--- a/weekly_presentations/week10_advanced_structured_products.pptx
+++ b/weekly_presentations/week10_advanced_structured_products.pptx
@@ -14,6 +14,7 @@
     <p:sldId id="262" r:id="rId13"/>
     <p:sldId id="263" r:id="rId14"/>
     <p:sldId id="264" r:id="rId15"/>
+    <p:sldId id="265" r:id="rId16"/>
   </p:sldIdLst>
   <p:sldSz cx="12191695" cy="6858000" type="screen4x3"/>
   <p:notesSz cx="6858000" cy="9144000"/>
@@ -3250,6 +3251,164 @@
 </p:sld>
 </file>
 
+<file path=ppt/slides/slide10.xml><?xml version="1.0" encoding="utf-8"?>
+<p:sld xmlns:a="http://schemas.openxmlformats.org/drawingml/2006/main" xmlns:p="http://schemas.openxmlformats.org/presentationml/2006/main" xmlns:r="http://schemas.openxmlformats.org/officeDocument/2006/relationships">
+  <p:cSld>
+    <p:spTree>
+      <p:nvGrpSpPr>
+        <p:cNvPr id="1" name=""/>
+        <p:cNvGrpSpPr/>
+        <p:nvPr/>
+      </p:nvGrpSpPr>
+      <p:grpSpPr/>
+      <p:pic>
+        <p:nvPicPr>
+          <p:cNvPr id="2" name="Picture 1" descr="ncsu_logo.png"/>
+          <p:cNvPicPr>
+            <a:picLocks noChangeAspect="1"/>
+          </p:cNvPicPr>
+          <p:nvPr/>
+        </p:nvPicPr>
+        <p:blipFill>
+          <a:blip r:embed="rId2"/>
+          <a:stretch>
+            <a:fillRect/>
+          </a:stretch>
+        </p:blipFill>
+        <p:spPr>
+          <a:xfrm>
+            <a:off x="9784080" y="274320"/>
+            <a:ext cx="2011680" cy="316653"/>
+          </a:xfrm>
+          <a:prstGeom prst="rect">
+            <a:avLst/>
+          </a:prstGeom>
+        </p:spPr>
+      </p:pic>
+      <p:sp>
+        <p:nvSpPr>
+          <p:cNvPr id="3" name="TextBox 2"/>
+          <p:cNvSpPr txBox="1"/>
+          <p:nvPr/>
+        </p:nvSpPr>
+        <p:spPr>
+          <a:xfrm>
+            <a:off x="457200" y="457200"/>
+            <a:ext cx="8961120" cy="822960"/>
+          </a:xfrm>
+          <a:prstGeom prst="rect">
+            <a:avLst/>
+          </a:prstGeom>
+          <a:noFill/>
+        </p:spPr>
+        <p:txBody>
+          <a:bodyPr wrap="square">
+            <a:spAutoFit/>
+          </a:bodyPr>
+          <a:lstStyle/>
+          <a:p>
+            <a:r>
+              <a:rPr sz="2400" b="1" i="0">
+                <a:solidFill>
+                  <a:srgbClr val="990000"/>
+                </a:solidFill>
+                <a:latin typeface="Arial"/>
+              </a:rPr>
+              <a:t>Reading</a:t>
+            </a:r>
+          </a:p>
+        </p:txBody>
+      </p:sp>
+      <p:sp>
+        <p:nvSpPr>
+          <p:cNvPr id="4" name="Rectangle 3"/>
+          <p:cNvSpPr/>
+          <p:nvPr/>
+        </p:nvSpPr>
+        <p:spPr>
+          <a:xfrm>
+            <a:off x="457200" y="1371600"/>
+            <a:ext cx="11247120" cy="27940"/>
+          </a:xfrm>
+          <a:prstGeom prst="rect">
+            <a:avLst/>
+          </a:prstGeom>
+          <a:solidFill>
+            <a:srgbClr val="CC0000"/>
+          </a:solidFill>
+          <a:ln>
+            <a:noFill/>
+          </a:ln>
+        </p:spPr>
+        <p:style>
+          <a:lnRef idx="1">
+            <a:schemeClr val="accent1"/>
+          </a:lnRef>
+          <a:fillRef idx="3">
+            <a:schemeClr val="accent1"/>
+          </a:fillRef>
+          <a:effectRef idx="2">
+            <a:schemeClr val="accent1"/>
+          </a:effectRef>
+          <a:fontRef idx="minor">
+            <a:schemeClr val="lt1"/>
+          </a:fontRef>
+        </p:style>
+        <p:txBody>
+          <a:bodyPr rtlCol="0" anchor="ctr"/>
+          <a:lstStyle/>
+          <a:p>
+            <a:pPr algn="ctr"/>
+          </a:p>
+        </p:txBody>
+      </p:sp>
+      <p:sp>
+        <p:nvSpPr>
+          <p:cNvPr id="5" name="TextBox 4"/>
+          <p:cNvSpPr txBox="1"/>
+          <p:nvPr/>
+        </p:nvSpPr>
+        <p:spPr>
+          <a:xfrm>
+            <a:off x="640080" y="1600200"/>
+            <a:ext cx="10972800" cy="4937760"/>
+          </a:xfrm>
+          <a:prstGeom prst="rect">
+            <a:avLst/>
+          </a:prstGeom>
+          <a:noFill/>
+        </p:spPr>
+        <p:txBody>
+          <a:bodyPr wrap="square">
+            <a:spAutoFit/>
+          </a:bodyPr>
+          <a:lstStyle/>
+          <a:p>
+            <a:pPr>
+              <a:spcAft>
+                <a:spcPts val="800"/>
+              </a:spcAft>
+            </a:pPr>
+            <a:r>
+              <a:rPr sz="1700" b="0" i="0">
+                <a:solidFill>
+                  <a:srgbClr val="1A1A1A"/>
+                </a:solidFill>
+                <a:latin typeface="Arial"/>
+              </a:rPr>
+              <a:t>•  Gueant (2016) [chosen extension]; El Aoud-Abergel (2015); +1 paper of your choice</a:t>
+            </a:r>
+          </a:p>
+        </p:txBody>
+      </p:sp>
+    </p:spTree>
+  </p:cSld>
+  <p:clrMapOvr>
+    <a:masterClrMapping/>
+  </p:clrMapOvr>
+</p:sld>
+</file>
+
 <file path=ppt/slides/slide2.xml><?xml version="1.0" encoding="utf-8"?>
 <p:sld xmlns:a="http://schemas.openxmlformats.org/drawingml/2006/main" xmlns:p="http://schemas.openxmlformats.org/presentationml/2006/main" xmlns:r="http://schemas.openxmlformats.org/officeDocument/2006/relationships">
   <p:cSld>
@@ -4595,7 +4754,7 @@
           <a:noFill/>
         </p:spPr>
         <p:txBody>
-          <a:bodyPr wrap="square">
+          <a:bodyPr wrap="none">
             <a:spAutoFit/>
           </a:bodyPr>
           <a:lstStyle/>
@@ -4607,7 +4766,7 @@
                 </a:solidFill>
                 <a:latin typeface="Arial"/>
               </a:rPr>
-              <a:t>Reading</a:t>
+              <a:t>Glossary — Key Terms</a:t>
             </a:r>
           </a:p>
         </p:txBody>
@@ -4679,17 +4838,176 @@
           <a:p>
             <a:pPr>
               <a:spcAft>
-                <a:spcPts val="800"/>
+                <a:spcPts val="700"/>
               </a:spcAft>
             </a:pPr>
             <a:r>
-              <a:rPr sz="1700" b="0" i="0">
-                <a:solidFill>
-                  <a:srgbClr val="1A1A1A"/>
+              <a:rPr sz="1500" b="1" i="0">
+                <a:solidFill>
+                  <a:srgbClr val="CC0000"/>
                 </a:solidFill>
                 <a:latin typeface="Arial"/>
               </a:rPr>
-              <a:t>•  Gueant (2016) [chosen extension]; El Aoud-Abergel (2015); +1 paper of your choice</a:t>
+              <a:t>Multi-asset market making — </a:t>
+            </a:r>
+            <a:r>
+              <a:rPr sz="1500" b="0" i="0">
+                <a:solidFill>
+                  <a:srgbClr val="1A1A1A"/>
+                </a:solidFill>
+                <a:latin typeface="Arial"/>
+              </a:rPr>
+              <a:t>jointly quoting correlated underlyings (e.g., BTC and ETH)</a:t>
+            </a:r>
+          </a:p>
+          <a:p>
+            <a:pPr>
+              <a:spcAft>
+                <a:spcPts val="700"/>
+              </a:spcAft>
+            </a:pPr>
+            <a:r>
+              <a:rPr sz="1500" b="1" i="0">
+                <a:solidFill>
+                  <a:srgbClr val="CC0000"/>
+                </a:solidFill>
+                <a:latin typeface="Arial"/>
+              </a:rPr>
+              <a:t>Robust optimization — </a:t>
+            </a:r>
+            <a:r>
+              <a:rPr sz="1500" b="0" i="0">
+                <a:solidFill>
+                  <a:srgbClr val="1A1A1A"/>
+                </a:solidFill>
+                <a:latin typeface="Arial"/>
+              </a:rPr>
+              <a:t>optimizing against the worst case over an uncertainty set</a:t>
+            </a:r>
+          </a:p>
+          <a:p>
+            <a:pPr>
+              <a:spcAft>
+                <a:spcPts val="700"/>
+              </a:spcAft>
+            </a:pPr>
+            <a:r>
+              <a:rPr sz="1500" b="1" i="0">
+                <a:solidFill>
+                  <a:srgbClr val="CC0000"/>
+                </a:solidFill>
+                <a:latin typeface="Arial"/>
+              </a:rPr>
+              <a:t>Adverse-selection-aware quoting — </a:t>
+            </a:r>
+            <a:r>
+              <a:rPr sz="1500" b="0" i="0">
+                <a:solidFill>
+                  <a:srgbClr val="1A1A1A"/>
+                </a:solidFill>
+                <a:latin typeface="Arial"/>
+              </a:rPr>
+              <a:t>skewing quotes using order-flow signals</a:t>
+            </a:r>
+          </a:p>
+          <a:p>
+            <a:pPr>
+              <a:spcAft>
+                <a:spcPts val="700"/>
+              </a:spcAft>
+            </a:pPr>
+            <a:r>
+              <a:rPr sz="1500" b="1" i="0">
+                <a:solidFill>
+                  <a:srgbClr val="CC0000"/>
+                </a:solidFill>
+                <a:latin typeface="Arial"/>
+              </a:rPr>
+              <a:t>Collar — </a:t>
+            </a:r>
+            <a:r>
+              <a:rPr sz="1500" b="0" i="0">
+                <a:solidFill>
+                  <a:srgbClr val="1A1A1A"/>
+                </a:solidFill>
+                <a:latin typeface="Arial"/>
+              </a:rPr>
+              <a:t>long put + short call that fixes a price band around a holding</a:t>
+            </a:r>
+          </a:p>
+          <a:p>
+            <a:pPr>
+              <a:spcAft>
+                <a:spcPts val="700"/>
+              </a:spcAft>
+            </a:pPr>
+            <a:r>
+              <a:rPr sz="1500" b="1" i="0">
+                <a:solidFill>
+                  <a:srgbClr val="CC0000"/>
+                </a:solidFill>
+                <a:latin typeface="Arial"/>
+              </a:rPr>
+              <a:t>Accumulator / decumulator — </a:t>
+            </a:r>
+            <a:r>
+              <a:rPr sz="1500" b="0" i="0">
+                <a:solidFill>
+                  <a:srgbClr val="1A1A1A"/>
+                </a:solidFill>
+                <a:latin typeface="Arial"/>
+              </a:rPr>
+              <a:t>products for staged accumulation or liquidation</a:t>
+            </a:r>
+          </a:p>
+          <a:p>
+            <a:pPr>
+              <a:spcAft>
+                <a:spcPts val="700"/>
+              </a:spcAft>
+            </a:pPr>
+            <a:r>
+              <a:rPr sz="1500" b="1" i="0">
+                <a:solidFill>
+                  <a:srgbClr val="CC0000"/>
+                </a:solidFill>
+                <a:latin typeface="Arial"/>
+              </a:rPr>
+              <a:t>Coupon product — </a:t>
+            </a:r>
+            <a:r>
+              <a:rPr sz="1500" b="0" i="0">
+                <a:solidFill>
+                  <a:srgbClr val="1A1A1A"/>
+                </a:solidFill>
+                <a:latin typeface="Arial"/>
+              </a:rPr>
+              <a:t>a yield-enhancement structured note</a:t>
+            </a:r>
+          </a:p>
+          <a:p>
+            <a:pPr>
+              <a:spcAft>
+                <a:spcPts val="700"/>
+              </a:spcAft>
+            </a:pPr>
+            <a:r>
+              <a:rPr sz="1500" b="1" i="0">
+                <a:solidFill>
+                  <a:srgbClr val="CC0000"/>
+                </a:solidFill>
+                <a:latin typeface="Arial"/>
+              </a:rPr>
+              <a:t>Structured product — </a:t>
+            </a:r>
+            <a:r>
+              <a:rPr sz="1500" b="0" i="0">
+                <a:solidFill>
+                  <a:srgbClr val="1A1A1A"/>
+                </a:solidFill>
+                <a:latin typeface="Arial"/>
+              </a:rPr>
+              <a:t>a packaged derivative payoff sold to clients or corporates</a:t>
             </a:r>
           </a:p>
         </p:txBody>

--- a/weekly_presentations/week10_advanced_structured_products.pptx
+++ b/weekly_presentations/week10_advanced_structured_products.pptx
@@ -15,6 +15,7 @@
     <p:sldId id="263" r:id="rId14"/>
     <p:sldId id="264" r:id="rId15"/>
     <p:sldId id="265" r:id="rId16"/>
+    <p:sldId id="266" r:id="rId17"/>
   </p:sldIdLst>
   <p:sldSz cx="12191695" cy="6858000" type="screen4x3"/>
   <p:notesSz cx="6858000" cy="9144000"/>
@@ -3397,6 +3398,212 @@
                 <a:latin typeface="Arial"/>
               </a:rPr>
               <a:t>•  Gueant (2016) [chosen extension]; El Aoud-Abergel (2015); +1 paper of your choice</a:t>
+            </a:r>
+          </a:p>
+        </p:txBody>
+      </p:sp>
+    </p:spTree>
+  </p:cSld>
+  <p:clrMapOvr>
+    <a:masterClrMapping/>
+  </p:clrMapOvr>
+</p:sld>
+</file>
+
+<file path=ppt/slides/slide11.xml><?xml version="1.0" encoding="utf-8"?>
+<p:sld xmlns:a="http://schemas.openxmlformats.org/drawingml/2006/main" xmlns:p="http://schemas.openxmlformats.org/presentationml/2006/main" xmlns:r="http://schemas.openxmlformats.org/officeDocument/2006/relationships">
+  <p:cSld>
+    <p:spTree>
+      <p:nvGrpSpPr>
+        <p:cNvPr id="1" name=""/>
+        <p:cNvGrpSpPr/>
+        <p:nvPr/>
+      </p:nvGrpSpPr>
+      <p:grpSpPr/>
+      <p:pic>
+        <p:nvPicPr>
+          <p:cNvPr id="2" name="Picture 1" descr="ncsu_logo.png"/>
+          <p:cNvPicPr>
+            <a:picLocks noChangeAspect="1"/>
+          </p:cNvPicPr>
+          <p:nvPr/>
+        </p:nvPicPr>
+        <p:blipFill>
+          <a:blip r:embed="rId2"/>
+          <a:stretch>
+            <a:fillRect/>
+          </a:stretch>
+        </p:blipFill>
+        <p:spPr>
+          <a:xfrm>
+            <a:off x="9784080" y="274320"/>
+            <a:ext cx="2011680" cy="316653"/>
+          </a:xfrm>
+          <a:prstGeom prst="rect">
+            <a:avLst/>
+          </a:prstGeom>
+        </p:spPr>
+      </p:pic>
+      <p:sp>
+        <p:nvSpPr>
+          <p:cNvPr id="3" name="TextBox 2"/>
+          <p:cNvSpPr txBox="1"/>
+          <p:nvPr/>
+        </p:nvSpPr>
+        <p:spPr>
+          <a:xfrm>
+            <a:off x="457200" y="457200"/>
+            <a:ext cx="8961120" cy="822960"/>
+          </a:xfrm>
+          <a:prstGeom prst="rect">
+            <a:avLst/>
+          </a:prstGeom>
+          <a:noFill/>
+        </p:spPr>
+        <p:txBody>
+          <a:bodyPr wrap="square">
+            <a:spAutoFit/>
+          </a:bodyPr>
+          <a:lstStyle/>
+          <a:p>
+            <a:r>
+              <a:rPr sz="2400" b="1" i="0">
+                <a:solidFill>
+                  <a:srgbClr val="990000"/>
+                </a:solidFill>
+                <a:latin typeface="Arial"/>
+              </a:rPr>
+              <a:t>References</a:t>
+            </a:r>
+          </a:p>
+        </p:txBody>
+      </p:sp>
+      <p:sp>
+        <p:nvSpPr>
+          <p:cNvPr id="4" name="Rectangle 3"/>
+          <p:cNvSpPr/>
+          <p:nvPr/>
+        </p:nvSpPr>
+        <p:spPr>
+          <a:xfrm>
+            <a:off x="457200" y="1371600"/>
+            <a:ext cx="11247120" cy="27940"/>
+          </a:xfrm>
+          <a:prstGeom prst="rect">
+            <a:avLst/>
+          </a:prstGeom>
+          <a:solidFill>
+            <a:srgbClr val="CC0000"/>
+          </a:solidFill>
+          <a:ln>
+            <a:noFill/>
+          </a:ln>
+        </p:spPr>
+        <p:style>
+          <a:lnRef idx="1">
+            <a:schemeClr val="accent1"/>
+          </a:lnRef>
+          <a:fillRef idx="3">
+            <a:schemeClr val="accent1"/>
+          </a:fillRef>
+          <a:effectRef idx="2">
+            <a:schemeClr val="accent1"/>
+          </a:effectRef>
+          <a:fontRef idx="minor">
+            <a:schemeClr val="lt1"/>
+          </a:fontRef>
+        </p:style>
+        <p:txBody>
+          <a:bodyPr rtlCol="0" anchor="ctr"/>
+          <a:lstStyle/>
+          <a:p>
+            <a:pPr algn="ctr"/>
+          </a:p>
+        </p:txBody>
+      </p:sp>
+      <p:sp>
+        <p:nvSpPr>
+          <p:cNvPr id="5" name="TextBox 4"/>
+          <p:cNvSpPr txBox="1"/>
+          <p:nvPr/>
+        </p:nvSpPr>
+        <p:spPr>
+          <a:xfrm>
+            <a:off x="640080" y="1600200"/>
+            <a:ext cx="10972800" cy="4937760"/>
+          </a:xfrm>
+          <a:prstGeom prst="rect">
+            <a:avLst/>
+          </a:prstGeom>
+          <a:noFill/>
+        </p:spPr>
+        <p:txBody>
+          <a:bodyPr wrap="square">
+            <a:spAutoFit/>
+          </a:bodyPr>
+          <a:lstStyle/>
+          <a:p>
+            <a:pPr>
+              <a:spcAft>
+                <a:spcPts val="500"/>
+              </a:spcAft>
+            </a:pPr>
+            <a:r>
+              <a:rPr sz="1200" b="0" i="0">
+                <a:solidFill>
+                  <a:srgbClr val="1A1A1A"/>
+                </a:solidFill>
+                <a:latin typeface="Arial"/>
+              </a:rPr>
+              <a:t>•  Gueant, O. (2016). The Financial Mathematics of Market Liquidity. Chapman &amp; Hall/CRC.</a:t>
+            </a:r>
+          </a:p>
+          <a:p>
+            <a:pPr>
+              <a:spcAft>
+                <a:spcPts val="500"/>
+              </a:spcAft>
+            </a:pPr>
+            <a:r>
+              <a:rPr sz="1200" b="0" i="0">
+                <a:solidFill>
+                  <a:srgbClr val="1A1A1A"/>
+                </a:solidFill>
+                <a:latin typeface="Arial"/>
+              </a:rPr>
+              <a:t>•  El Aoud, S., &amp; Abergel, F. (2015). A stochastic control approach to option market making. Market Microstructure and Liquidity, 1(1), 1550006.</a:t>
+            </a:r>
+          </a:p>
+          <a:p>
+            <a:pPr>
+              <a:spcAft>
+                <a:spcPts val="500"/>
+              </a:spcAft>
+            </a:pPr>
+            <a:r>
+              <a:rPr sz="1200" b="0" i="0">
+                <a:solidFill>
+                  <a:srgbClr val="1A1A1A"/>
+                </a:solidFill>
+                <a:latin typeface="Arial"/>
+              </a:rPr>
+              <a:t>•  Cartea, Jaikumar, &amp; Penalva (2015). Algorithmic and High-Frequency Trading.</a:t>
+            </a:r>
+          </a:p>
+          <a:p>
+            <a:pPr>
+              <a:spcAft>
+                <a:spcPts val="500"/>
+              </a:spcAft>
+            </a:pPr>
+            <a:r>
+              <a:rPr sz="1200" b="0" i="0">
+                <a:solidFill>
+                  <a:srgbClr val="1A1A1A"/>
+                </a:solidFill>
+                <a:latin typeface="Arial"/>
+              </a:rPr>
+              <a:t>•  Plus one paper of your choice relevant to the chosen extension.</a:t>
             </a:r>
           </a:p>
         </p:txBody>

--- a/weekly_presentations/week10_advanced_structured_products.pptx
+++ b/weekly_presentations/week10_advanced_structured_products.pptx
@@ -16,6 +16,7 @@
     <p:sldId id="264" r:id="rId15"/>
     <p:sldId id="265" r:id="rId16"/>
     <p:sldId id="266" r:id="rId17"/>
+    <p:sldId id="267" r:id="rId18"/>
   </p:sldIdLst>
   <p:sldSz cx="12191695" cy="6858000" type="screen4x3"/>
   <p:notesSz cx="6858000" cy="9144000"/>
@@ -3303,7 +3304,7 @@
           <a:noFill/>
         </p:spPr>
         <p:txBody>
-          <a:bodyPr wrap="square">
+          <a:bodyPr wrap="none">
             <a:spAutoFit/>
           </a:bodyPr>
           <a:lstStyle/>
@@ -3315,7 +3316,7 @@
                 </a:solidFill>
                 <a:latin typeface="Arial"/>
               </a:rPr>
-              <a:t>Reading</a:t>
+              <a:t>Glossary — Key Terms</a:t>
             </a:r>
           </a:p>
         </p:txBody>
@@ -3387,17 +3388,176 @@
           <a:p>
             <a:pPr>
               <a:spcAft>
-                <a:spcPts val="800"/>
+                <a:spcPts val="700"/>
               </a:spcAft>
             </a:pPr>
             <a:r>
-              <a:rPr sz="1700" b="0" i="0">
+              <a:rPr sz="1500" b="1" i="0">
+                <a:solidFill>
+                  <a:srgbClr val="CC0000"/>
+                </a:solidFill>
+                <a:latin typeface="Arial"/>
+              </a:rPr>
+              <a:t>Multi-asset market making — </a:t>
+            </a:r>
+            <a:r>
+              <a:rPr sz="1500" b="0" i="0">
                 <a:solidFill>
                   <a:srgbClr val="1A1A1A"/>
                 </a:solidFill>
                 <a:latin typeface="Arial"/>
               </a:rPr>
-              <a:t>•  Gueant (2016) [chosen extension]; El Aoud-Abergel (2015); +1 paper of your choice</a:t>
+              <a:t>jointly quoting correlated underlyings (e.g., BTC and ETH)</a:t>
+            </a:r>
+          </a:p>
+          <a:p>
+            <a:pPr>
+              <a:spcAft>
+                <a:spcPts val="700"/>
+              </a:spcAft>
+            </a:pPr>
+            <a:r>
+              <a:rPr sz="1500" b="1" i="0">
+                <a:solidFill>
+                  <a:srgbClr val="CC0000"/>
+                </a:solidFill>
+                <a:latin typeface="Arial"/>
+              </a:rPr>
+              <a:t>Robust optimization — </a:t>
+            </a:r>
+            <a:r>
+              <a:rPr sz="1500" b="0" i="0">
+                <a:solidFill>
+                  <a:srgbClr val="1A1A1A"/>
+                </a:solidFill>
+                <a:latin typeface="Arial"/>
+              </a:rPr>
+              <a:t>optimizing against the worst case over an uncertainty set</a:t>
+            </a:r>
+          </a:p>
+          <a:p>
+            <a:pPr>
+              <a:spcAft>
+                <a:spcPts val="700"/>
+              </a:spcAft>
+            </a:pPr>
+            <a:r>
+              <a:rPr sz="1500" b="1" i="0">
+                <a:solidFill>
+                  <a:srgbClr val="CC0000"/>
+                </a:solidFill>
+                <a:latin typeface="Arial"/>
+              </a:rPr>
+              <a:t>Adverse-selection-aware quoting — </a:t>
+            </a:r>
+            <a:r>
+              <a:rPr sz="1500" b="0" i="0">
+                <a:solidFill>
+                  <a:srgbClr val="1A1A1A"/>
+                </a:solidFill>
+                <a:latin typeface="Arial"/>
+              </a:rPr>
+              <a:t>skewing quotes using order-flow signals</a:t>
+            </a:r>
+          </a:p>
+          <a:p>
+            <a:pPr>
+              <a:spcAft>
+                <a:spcPts val="700"/>
+              </a:spcAft>
+            </a:pPr>
+            <a:r>
+              <a:rPr sz="1500" b="1" i="0">
+                <a:solidFill>
+                  <a:srgbClr val="CC0000"/>
+                </a:solidFill>
+                <a:latin typeface="Arial"/>
+              </a:rPr>
+              <a:t>Collar — </a:t>
+            </a:r>
+            <a:r>
+              <a:rPr sz="1500" b="0" i="0">
+                <a:solidFill>
+                  <a:srgbClr val="1A1A1A"/>
+                </a:solidFill>
+                <a:latin typeface="Arial"/>
+              </a:rPr>
+              <a:t>long put + short call that fixes a price band around a holding</a:t>
+            </a:r>
+          </a:p>
+          <a:p>
+            <a:pPr>
+              <a:spcAft>
+                <a:spcPts val="700"/>
+              </a:spcAft>
+            </a:pPr>
+            <a:r>
+              <a:rPr sz="1500" b="1" i="0">
+                <a:solidFill>
+                  <a:srgbClr val="CC0000"/>
+                </a:solidFill>
+                <a:latin typeface="Arial"/>
+              </a:rPr>
+              <a:t>Accumulator / decumulator — </a:t>
+            </a:r>
+            <a:r>
+              <a:rPr sz="1500" b="0" i="0">
+                <a:solidFill>
+                  <a:srgbClr val="1A1A1A"/>
+                </a:solidFill>
+                <a:latin typeface="Arial"/>
+              </a:rPr>
+              <a:t>products for staged accumulation or liquidation</a:t>
+            </a:r>
+          </a:p>
+          <a:p>
+            <a:pPr>
+              <a:spcAft>
+                <a:spcPts val="700"/>
+              </a:spcAft>
+            </a:pPr>
+            <a:r>
+              <a:rPr sz="1500" b="1" i="0">
+                <a:solidFill>
+                  <a:srgbClr val="CC0000"/>
+                </a:solidFill>
+                <a:latin typeface="Arial"/>
+              </a:rPr>
+              <a:t>Coupon product — </a:t>
+            </a:r>
+            <a:r>
+              <a:rPr sz="1500" b="0" i="0">
+                <a:solidFill>
+                  <a:srgbClr val="1A1A1A"/>
+                </a:solidFill>
+                <a:latin typeface="Arial"/>
+              </a:rPr>
+              <a:t>a yield-enhancement structured note</a:t>
+            </a:r>
+          </a:p>
+          <a:p>
+            <a:pPr>
+              <a:spcAft>
+                <a:spcPts val="700"/>
+              </a:spcAft>
+            </a:pPr>
+            <a:r>
+              <a:rPr sz="1500" b="1" i="0">
+                <a:solidFill>
+                  <a:srgbClr val="CC0000"/>
+                </a:solidFill>
+                <a:latin typeface="Arial"/>
+              </a:rPr>
+              <a:t>Structured product — </a:t>
+            </a:r>
+            <a:r>
+              <a:rPr sz="1500" b="0" i="0">
+                <a:solidFill>
+                  <a:srgbClr val="1A1A1A"/>
+                </a:solidFill>
+                <a:latin typeface="Arial"/>
+              </a:rPr>
+              <a:t>a packaged derivative payoff sold to clients or corporates</a:t>
             </a:r>
           </a:p>
         </p:txBody>
@@ -3473,6 +3633,164 @@
                 </a:solidFill>
                 <a:latin typeface="Arial"/>
               </a:rPr>
+              <a:t>Reading</a:t>
+            </a:r>
+          </a:p>
+        </p:txBody>
+      </p:sp>
+      <p:sp>
+        <p:nvSpPr>
+          <p:cNvPr id="4" name="Rectangle 3"/>
+          <p:cNvSpPr/>
+          <p:nvPr/>
+        </p:nvSpPr>
+        <p:spPr>
+          <a:xfrm>
+            <a:off x="457200" y="1371600"/>
+            <a:ext cx="11247120" cy="27940"/>
+          </a:xfrm>
+          <a:prstGeom prst="rect">
+            <a:avLst/>
+          </a:prstGeom>
+          <a:solidFill>
+            <a:srgbClr val="CC0000"/>
+          </a:solidFill>
+          <a:ln>
+            <a:noFill/>
+          </a:ln>
+        </p:spPr>
+        <p:style>
+          <a:lnRef idx="1">
+            <a:schemeClr val="accent1"/>
+          </a:lnRef>
+          <a:fillRef idx="3">
+            <a:schemeClr val="accent1"/>
+          </a:fillRef>
+          <a:effectRef idx="2">
+            <a:schemeClr val="accent1"/>
+          </a:effectRef>
+          <a:fontRef idx="minor">
+            <a:schemeClr val="lt1"/>
+          </a:fontRef>
+        </p:style>
+        <p:txBody>
+          <a:bodyPr rtlCol="0" anchor="ctr"/>
+          <a:lstStyle/>
+          <a:p>
+            <a:pPr algn="ctr"/>
+          </a:p>
+        </p:txBody>
+      </p:sp>
+      <p:sp>
+        <p:nvSpPr>
+          <p:cNvPr id="5" name="TextBox 4"/>
+          <p:cNvSpPr txBox="1"/>
+          <p:nvPr/>
+        </p:nvSpPr>
+        <p:spPr>
+          <a:xfrm>
+            <a:off x="640080" y="1600200"/>
+            <a:ext cx="10972800" cy="4937760"/>
+          </a:xfrm>
+          <a:prstGeom prst="rect">
+            <a:avLst/>
+          </a:prstGeom>
+          <a:noFill/>
+        </p:spPr>
+        <p:txBody>
+          <a:bodyPr wrap="square">
+            <a:spAutoFit/>
+          </a:bodyPr>
+          <a:lstStyle/>
+          <a:p>
+            <a:pPr>
+              <a:spcAft>
+                <a:spcPts val="800"/>
+              </a:spcAft>
+            </a:pPr>
+            <a:r>
+              <a:rPr sz="1700" b="0" i="0">
+                <a:solidFill>
+                  <a:srgbClr val="1A1A1A"/>
+                </a:solidFill>
+                <a:latin typeface="Arial"/>
+              </a:rPr>
+              <a:t>•  Gueant (2016) [chosen extension]; El Aoud-Abergel (2015); +1 paper of your choice</a:t>
+            </a:r>
+          </a:p>
+        </p:txBody>
+      </p:sp>
+    </p:spTree>
+  </p:cSld>
+  <p:clrMapOvr>
+    <a:masterClrMapping/>
+  </p:clrMapOvr>
+</p:sld>
+</file>
+
+<file path=ppt/slides/slide12.xml><?xml version="1.0" encoding="utf-8"?>
+<p:sld xmlns:a="http://schemas.openxmlformats.org/drawingml/2006/main" xmlns:p="http://schemas.openxmlformats.org/presentationml/2006/main" xmlns:r="http://schemas.openxmlformats.org/officeDocument/2006/relationships">
+  <p:cSld>
+    <p:spTree>
+      <p:nvGrpSpPr>
+        <p:cNvPr id="1" name=""/>
+        <p:cNvGrpSpPr/>
+        <p:nvPr/>
+      </p:nvGrpSpPr>
+      <p:grpSpPr/>
+      <p:pic>
+        <p:nvPicPr>
+          <p:cNvPr id="2" name="Picture 1" descr="ncsu_logo.png"/>
+          <p:cNvPicPr>
+            <a:picLocks noChangeAspect="1"/>
+          </p:cNvPicPr>
+          <p:nvPr/>
+        </p:nvPicPr>
+        <p:blipFill>
+          <a:blip r:embed="rId2"/>
+          <a:stretch>
+            <a:fillRect/>
+          </a:stretch>
+        </p:blipFill>
+        <p:spPr>
+          <a:xfrm>
+            <a:off x="9784080" y="274320"/>
+            <a:ext cx="2011680" cy="316653"/>
+          </a:xfrm>
+          <a:prstGeom prst="rect">
+            <a:avLst/>
+          </a:prstGeom>
+        </p:spPr>
+      </p:pic>
+      <p:sp>
+        <p:nvSpPr>
+          <p:cNvPr id="3" name="TextBox 2"/>
+          <p:cNvSpPr txBox="1"/>
+          <p:nvPr/>
+        </p:nvSpPr>
+        <p:spPr>
+          <a:xfrm>
+            <a:off x="457200" y="457200"/>
+            <a:ext cx="8961120" cy="822960"/>
+          </a:xfrm>
+          <a:prstGeom prst="rect">
+            <a:avLst/>
+          </a:prstGeom>
+          <a:noFill/>
+        </p:spPr>
+        <p:txBody>
+          <a:bodyPr wrap="square">
+            <a:spAutoFit/>
+          </a:bodyPr>
+          <a:lstStyle/>
+          <a:p>
+            <a:r>
+              <a:rPr sz="2400" b="1" i="0">
+                <a:solidFill>
+                  <a:srgbClr val="990000"/>
+                </a:solidFill>
+                <a:latin typeface="Arial"/>
+              </a:rPr>
               <a:t>References</a:t>
             </a:r>
           </a:p>
@@ -3679,7 +3997,7 @@
                 </a:solidFill>
                 <a:latin typeface="Arial"/>
               </a:rPr>
-              <a:t>Learning Objectives</a:t>
+              <a:t>Contents</a:t>
             </a:r>
           </a:p>
         </p:txBody>
@@ -3751,49 +4069,161 @@
           <a:p>
             <a:pPr>
               <a:spcAft>
-                <a:spcPts val="800"/>
+                <a:spcPts val="500"/>
               </a:spcAft>
             </a:pPr>
             <a:r>
-              <a:rPr sz="1700" b="0" i="0">
+              <a:rPr sz="1200" b="0" i="0">
                 <a:solidFill>
                   <a:srgbClr val="1A1A1A"/>
                 </a:solidFill>
                 <a:latin typeface="Arial"/>
               </a:rPr>
-              <a:t>•  Implement one advanced Avellaneda-Stoikov extension</a:t>
+              <a:t>•  Learning objectives</a:t>
             </a:r>
           </a:p>
           <a:p>
             <a:pPr>
               <a:spcAft>
-                <a:spcPts val="800"/>
+                <a:spcPts val="500"/>
               </a:spcAft>
             </a:pPr>
             <a:r>
-              <a:rPr sz="1700" b="0" i="0">
+              <a:rPr sz="1200" b="0" i="0">
                 <a:solidFill>
                   <a:srgbClr val="1A1A1A"/>
                 </a:solidFill>
                 <a:latin typeface="Arial"/>
               </a:rPr>
-              <a:t>•  Understand corporate structured products</a:t>
+              <a:t>•  Lecture 1: Advanced Extensions</a:t>
             </a:r>
           </a:p>
           <a:p>
             <a:pPr>
               <a:spcAft>
-                <a:spcPts val="800"/>
+                <a:spcPts val="500"/>
               </a:spcAft>
             </a:pPr>
             <a:r>
-              <a:rPr sz="1700" b="0" i="0">
+              <a:rPr sz="1200" b="0" i="0">
                 <a:solidFill>
                   <a:srgbClr val="1A1A1A"/>
                 </a:solidFill>
                 <a:latin typeface="Arial"/>
               </a:rPr>
-              <a:t>•  Write and present a research-grade report</a:t>
+              <a:t>•  Lecture 2 (Guest: Fenni Kang, Coincall): Structured Products</a:t>
+            </a:r>
+          </a:p>
+          <a:p>
+            <a:pPr>
+              <a:spcAft>
+                <a:spcPts val="500"/>
+              </a:spcAft>
+            </a:pPr>
+            <a:r>
+              <a:rPr sz="1200" b="0" i="0">
+                <a:solidFill>
+                  <a:srgbClr val="1A1A1A"/>
+                </a:solidFill>
+                <a:latin typeface="Arial"/>
+              </a:rPr>
+              <a:t>•  Illustration</a:t>
+            </a:r>
+          </a:p>
+          <a:p>
+            <a:pPr>
+              <a:spcAft>
+                <a:spcPts val="500"/>
+              </a:spcAft>
+            </a:pPr>
+            <a:r>
+              <a:rPr sz="1200" b="0" i="0">
+                <a:solidFill>
+                  <a:srgbClr val="1A1A1A"/>
+                </a:solidFill>
+                <a:latin typeface="Arial"/>
+              </a:rPr>
+              <a:t>•  Derivation &amp; rationale</a:t>
+            </a:r>
+          </a:p>
+          <a:p>
+            <a:pPr>
+              <a:spcAft>
+                <a:spcPts val="500"/>
+              </a:spcAft>
+            </a:pPr>
+            <a:r>
+              <a:rPr sz="1200" b="0" i="0">
+                <a:solidFill>
+                  <a:srgbClr val="1A1A1A"/>
+                </a:solidFill>
+                <a:latin typeface="Arial"/>
+              </a:rPr>
+              <a:t>•  Getting the data from Coincall</a:t>
+            </a:r>
+          </a:p>
+          <a:p>
+            <a:pPr>
+              <a:spcAft>
+                <a:spcPts val="500"/>
+              </a:spcAft>
+            </a:pPr>
+            <a:r>
+              <a:rPr sz="1200" b="0" i="0">
+                <a:solidFill>
+                  <a:srgbClr val="1A1A1A"/>
+                </a:solidFill>
+                <a:latin typeface="Arial"/>
+              </a:rPr>
+              <a:t>•  Code: week10_collar.py</a:t>
+            </a:r>
+          </a:p>
+          <a:p>
+            <a:pPr>
+              <a:spcAft>
+                <a:spcPts val="500"/>
+              </a:spcAft>
+            </a:pPr>
+            <a:r>
+              <a:rPr sz="1200" b="0" i="0">
+                <a:solidFill>
+                  <a:srgbClr val="1A1A1A"/>
+                </a:solidFill>
+                <a:latin typeface="Arial"/>
+              </a:rPr>
+              <a:t>•  Glossary of key terms</a:t>
+            </a:r>
+          </a:p>
+          <a:p>
+            <a:pPr>
+              <a:spcAft>
+                <a:spcPts val="500"/>
+              </a:spcAft>
+            </a:pPr>
+            <a:r>
+              <a:rPr sz="1200" b="0" i="0">
+                <a:solidFill>
+                  <a:srgbClr val="1A1A1A"/>
+                </a:solidFill>
+                <a:latin typeface="Arial"/>
+              </a:rPr>
+              <a:t>•  Reading</a:t>
+            </a:r>
+          </a:p>
+          <a:p>
+            <a:pPr>
+              <a:spcAft>
+                <a:spcPts val="500"/>
+              </a:spcAft>
+            </a:pPr>
+            <a:r>
+              <a:rPr sz="1200" b="0" i="0">
+                <a:solidFill>
+                  <a:srgbClr val="1A1A1A"/>
+                </a:solidFill>
+                <a:latin typeface="Arial"/>
+              </a:rPr>
+              <a:t>•  References</a:t>
             </a:r>
           </a:p>
         </p:txBody>
@@ -3869,7 +4299,7 @@
                 </a:solidFill>
                 <a:latin typeface="Arial"/>
               </a:rPr>
-              <a:t>Lecture 1: Advanced Extensions</a:t>
+              <a:t>Learning Objectives</a:t>
             </a:r>
           </a:p>
         </p:txBody>
@@ -3951,7 +4381,7 @@
                 </a:solidFill>
                 <a:latin typeface="Arial"/>
               </a:rPr>
-              <a:t>•  Multi-asset market making (BTC + ETH, correlated)</a:t>
+              <a:t>•  Implement one advanced Avellaneda-Stoikov extension</a:t>
             </a:r>
           </a:p>
           <a:p>
@@ -3967,7 +4397,7 @@
                 </a:solidFill>
                 <a:latin typeface="Arial"/>
               </a:rPr>
-              <a:t>•  Adverse-selection-aware and signal-driven quoting</a:t>
+              <a:t>•  Understand corporate structured products</a:t>
             </a:r>
           </a:p>
           <a:p>
@@ -3983,7 +4413,7 @@
                 </a:solidFill>
                 <a:latin typeface="Arial"/>
               </a:rPr>
-              <a:t>•  Robust optimization: worst-case inventory penalty</a:t>
+              <a:t>•  Write and present a research-grade report</a:t>
             </a:r>
           </a:p>
         </p:txBody>
@@ -4059,7 +4489,7 @@
                 </a:solidFill>
                 <a:latin typeface="Arial"/>
               </a:rPr>
-              <a:t>Lecture 2 (Guest: Fenni Kang, Coincall): Structured Products</a:t>
+              <a:t>Lecture 1: Advanced Extensions</a:t>
             </a:r>
           </a:p>
         </p:txBody>
@@ -4141,7 +4571,7 @@
                 </a:solidFill>
                 <a:latin typeface="Arial"/>
               </a:rPr>
-              <a:t>•  Collars to fix a price band</a:t>
+              <a:t>•  Multi-asset market making (BTC + ETH, correlated)</a:t>
             </a:r>
           </a:p>
           <a:p>
@@ -4157,7 +4587,7 @@
                 </a:solidFill>
                 <a:latin typeface="Arial"/>
               </a:rPr>
-              <a:t>•  Accumulators / decumulators for staged flow</a:t>
+              <a:t>•  Adverse-selection-aware and signal-driven quoting</a:t>
             </a:r>
           </a:p>
           <a:p>
@@ -4173,23 +4603,7 @@
                 </a:solidFill>
                 <a:latin typeface="Arial"/>
               </a:rPr>
-              <a:t>•  Coupon / yield-enhancement products</a:t>
-            </a:r>
-          </a:p>
-          <a:p>
-            <a:pPr>
-              <a:spcAft>
-                <a:spcPts val="800"/>
-              </a:spcAft>
-            </a:pPr>
-            <a:r>
-              <a:rPr sz="1700" b="0" i="0">
-                <a:solidFill>
-                  <a:srgbClr val="1A1A1A"/>
-                </a:solidFill>
-                <a:latin typeface="Arial"/>
-              </a:rPr>
-              <a:t>•  How that flow lands on the market-maker's book</a:t>
+              <a:t>•  Robust optimization: worst-case inventory penalty</a:t>
             </a:r>
           </a:p>
         </p:txBody>
@@ -4228,7 +4642,7 @@
         </p:blipFill>
         <p:spPr>
           <a:xfrm>
-            <a:off x="9784080" y="228600"/>
+            <a:off x="9784080" y="274320"/>
             <a:ext cx="2011680" cy="316653"/>
           </a:xfrm>
           <a:prstGeom prst="rect">
@@ -4244,8 +4658,8 @@
         </p:nvSpPr>
         <p:spPr>
           <a:xfrm>
-            <a:off x="457200" y="411480"/>
-            <a:ext cx="8961120" cy="731520"/>
+            <a:off x="457200" y="457200"/>
+            <a:ext cx="8961120" cy="822960"/>
           </a:xfrm>
           <a:prstGeom prst="rect">
             <a:avLst/>
@@ -4253,47 +4667,153 @@
           <a:noFill/>
         </p:spPr>
         <p:txBody>
-          <a:bodyPr wrap="none">
+          <a:bodyPr wrap="square">
             <a:spAutoFit/>
           </a:bodyPr>
           <a:lstStyle/>
           <a:p>
             <a:r>
-              <a:rPr sz="2200" b="1" i="0">
+              <a:rPr sz="2400" b="1" i="0">
                 <a:solidFill>
                   <a:srgbClr val="990000"/>
                 </a:solidFill>
                 <a:latin typeface="Arial"/>
               </a:rPr>
-              <a:t>Illustration</a:t>
-            </a:r>
-          </a:p>
-        </p:txBody>
-      </p:sp>
-      <p:pic>
-        <p:nvPicPr>
-          <p:cNvPr id="4" name="Picture 3" descr="week10.png"/>
-          <p:cNvPicPr>
-            <a:picLocks noChangeAspect="1"/>
-          </p:cNvPicPr>
+              <a:t>Lecture 2 (Guest: Fenni Kang, Coincall): Structured Products</a:t>
+            </a:r>
+          </a:p>
+        </p:txBody>
+      </p:sp>
+      <p:sp>
+        <p:nvSpPr>
+          <p:cNvPr id="4" name="Rectangle 3"/>
+          <p:cNvSpPr/>
           <p:nvPr/>
-        </p:nvPicPr>
-        <p:blipFill>
-          <a:blip r:embed="rId3"/>
-          <a:stretch>
-            <a:fillRect/>
-          </a:stretch>
-        </p:blipFill>
-        <p:spPr>
-          <a:xfrm>
-            <a:off x="1280160" y="1371600"/>
-            <a:ext cx="9601200" cy="4625345"/>
+        </p:nvSpPr>
+        <p:spPr>
+          <a:xfrm>
+            <a:off x="457200" y="1371600"/>
+            <a:ext cx="11247120" cy="27940"/>
           </a:xfrm>
           <a:prstGeom prst="rect">
             <a:avLst/>
           </a:prstGeom>
-        </p:spPr>
-      </p:pic>
+          <a:solidFill>
+            <a:srgbClr val="CC0000"/>
+          </a:solidFill>
+          <a:ln>
+            <a:noFill/>
+          </a:ln>
+        </p:spPr>
+        <p:style>
+          <a:lnRef idx="1">
+            <a:schemeClr val="accent1"/>
+          </a:lnRef>
+          <a:fillRef idx="3">
+            <a:schemeClr val="accent1"/>
+          </a:fillRef>
+          <a:effectRef idx="2">
+            <a:schemeClr val="accent1"/>
+          </a:effectRef>
+          <a:fontRef idx="minor">
+            <a:schemeClr val="lt1"/>
+          </a:fontRef>
+        </p:style>
+        <p:txBody>
+          <a:bodyPr rtlCol="0" anchor="ctr"/>
+          <a:lstStyle/>
+          <a:p>
+            <a:pPr algn="ctr"/>
+          </a:p>
+        </p:txBody>
+      </p:sp>
+      <p:sp>
+        <p:nvSpPr>
+          <p:cNvPr id="5" name="TextBox 4"/>
+          <p:cNvSpPr txBox="1"/>
+          <p:nvPr/>
+        </p:nvSpPr>
+        <p:spPr>
+          <a:xfrm>
+            <a:off x="640080" y="1600200"/>
+            <a:ext cx="10972800" cy="4937760"/>
+          </a:xfrm>
+          <a:prstGeom prst="rect">
+            <a:avLst/>
+          </a:prstGeom>
+          <a:noFill/>
+        </p:spPr>
+        <p:txBody>
+          <a:bodyPr wrap="square">
+            <a:spAutoFit/>
+          </a:bodyPr>
+          <a:lstStyle/>
+          <a:p>
+            <a:pPr>
+              <a:spcAft>
+                <a:spcPts val="800"/>
+              </a:spcAft>
+            </a:pPr>
+            <a:r>
+              <a:rPr sz="1700" b="0" i="0">
+                <a:solidFill>
+                  <a:srgbClr val="1A1A1A"/>
+                </a:solidFill>
+                <a:latin typeface="Arial"/>
+              </a:rPr>
+              <a:t>•  Collars to fix a price band</a:t>
+            </a:r>
+          </a:p>
+          <a:p>
+            <a:pPr>
+              <a:spcAft>
+                <a:spcPts val="800"/>
+              </a:spcAft>
+            </a:pPr>
+            <a:r>
+              <a:rPr sz="1700" b="0" i="0">
+                <a:solidFill>
+                  <a:srgbClr val="1A1A1A"/>
+                </a:solidFill>
+                <a:latin typeface="Arial"/>
+              </a:rPr>
+              <a:t>•  Accumulators / decumulators for staged flow</a:t>
+            </a:r>
+          </a:p>
+          <a:p>
+            <a:pPr>
+              <a:spcAft>
+                <a:spcPts val="800"/>
+              </a:spcAft>
+            </a:pPr>
+            <a:r>
+              <a:rPr sz="1700" b="0" i="0">
+                <a:solidFill>
+                  <a:srgbClr val="1A1A1A"/>
+                </a:solidFill>
+                <a:latin typeface="Arial"/>
+              </a:rPr>
+              <a:t>•  Coupon / yield-enhancement products</a:t>
+            </a:r>
+          </a:p>
+          <a:p>
+            <a:pPr>
+              <a:spcAft>
+                <a:spcPts val="800"/>
+              </a:spcAft>
+            </a:pPr>
+            <a:r>
+              <a:rPr sz="1700" b="0" i="0">
+                <a:solidFill>
+                  <a:srgbClr val="1A1A1A"/>
+                </a:solidFill>
+                <a:latin typeface="Arial"/>
+              </a:rPr>
+              <a:t>•  How that flow lands on the market-maker's book</a:t>
+            </a:r>
+          </a:p>
+        </p:txBody>
+      </p:sp>
     </p:spTree>
   </p:cSld>
   <p:clrMapOvr>
@@ -4328,7 +4848,7 @@
         </p:blipFill>
         <p:spPr>
           <a:xfrm>
-            <a:off x="9784080" y="274320"/>
+            <a:off x="9784080" y="228600"/>
             <a:ext cx="2011680" cy="316653"/>
           </a:xfrm>
           <a:prstGeom prst="rect">
@@ -4344,8 +4864,8 @@
         </p:nvSpPr>
         <p:spPr>
           <a:xfrm>
-            <a:off x="457200" y="457200"/>
-            <a:ext cx="8961120" cy="822960"/>
+            <a:off x="457200" y="411480"/>
+            <a:ext cx="8961120" cy="731520"/>
           </a:xfrm>
           <a:prstGeom prst="rect">
             <a:avLst/>
@@ -4353,132 +4873,47 @@
           <a:noFill/>
         </p:spPr>
         <p:txBody>
-          <a:bodyPr wrap="square">
+          <a:bodyPr wrap="none">
             <a:spAutoFit/>
           </a:bodyPr>
           <a:lstStyle/>
           <a:p>
             <a:r>
-              <a:rPr sz="2400" b="1" i="0">
+              <a:rPr sz="2200" b="1" i="0">
                 <a:solidFill>
                   <a:srgbClr val="990000"/>
                 </a:solidFill>
                 <a:latin typeface="Arial"/>
               </a:rPr>
-              <a:t>Key Equations &amp; Why We Choose Them</a:t>
-            </a:r>
-          </a:p>
-          <a:p>
-            <a:r>
-              <a:rPr sz="1300" b="0" i="1">
-                <a:solidFill>
-                  <a:srgbClr val="6D6D6D"/>
-                </a:solidFill>
-                <a:latin typeface="Arial"/>
-              </a:rPr>
-              <a:t>Full derivations in the PDF deck</a:t>
-            </a:r>
-          </a:p>
-        </p:txBody>
-      </p:sp>
-      <p:sp>
-        <p:nvSpPr>
-          <p:cNvPr id="4" name="Rectangle 3"/>
-          <p:cNvSpPr/>
+              <a:t>Illustration</a:t>
+            </a:r>
+          </a:p>
+        </p:txBody>
+      </p:sp>
+      <p:pic>
+        <p:nvPicPr>
+          <p:cNvPr id="4" name="Picture 3" descr="week10.png"/>
+          <p:cNvPicPr>
+            <a:picLocks noChangeAspect="1"/>
+          </p:cNvPicPr>
           <p:nvPr/>
-        </p:nvSpPr>
-        <p:spPr>
-          <a:xfrm>
-            <a:off x="457200" y="1371600"/>
-            <a:ext cx="11247120" cy="27940"/>
+        </p:nvPicPr>
+        <p:blipFill>
+          <a:blip r:embed="rId3"/>
+          <a:stretch>
+            <a:fillRect/>
+          </a:stretch>
+        </p:blipFill>
+        <p:spPr>
+          <a:xfrm>
+            <a:off x="1280160" y="1371600"/>
+            <a:ext cx="9601200" cy="4625345"/>
           </a:xfrm>
           <a:prstGeom prst="rect">
             <a:avLst/>
           </a:prstGeom>
-          <a:solidFill>
-            <a:srgbClr val="CC0000"/>
-          </a:solidFill>
-          <a:ln>
-            <a:noFill/>
-          </a:ln>
-        </p:spPr>
-        <p:style>
-          <a:lnRef idx="1">
-            <a:schemeClr val="accent1"/>
-          </a:lnRef>
-          <a:fillRef idx="3">
-            <a:schemeClr val="accent1"/>
-          </a:fillRef>
-          <a:effectRef idx="2">
-            <a:schemeClr val="accent1"/>
-          </a:effectRef>
-          <a:fontRef idx="minor">
-            <a:schemeClr val="lt1"/>
-          </a:fontRef>
-        </p:style>
-        <p:txBody>
-          <a:bodyPr rtlCol="0" anchor="ctr"/>
-          <a:lstStyle/>
-          <a:p>
-            <a:pPr algn="ctr"/>
-          </a:p>
-        </p:txBody>
-      </p:sp>
-      <p:sp>
-        <p:nvSpPr>
-          <p:cNvPr id="5" name="TextBox 4"/>
-          <p:cNvSpPr txBox="1"/>
-          <p:nvPr/>
-        </p:nvSpPr>
-        <p:spPr>
-          <a:xfrm>
-            <a:off x="640080" y="1600200"/>
-            <a:ext cx="10972800" cy="4937760"/>
-          </a:xfrm>
-          <a:prstGeom prst="rect">
-            <a:avLst/>
-          </a:prstGeom>
-          <a:noFill/>
-        </p:spPr>
-        <p:txBody>
-          <a:bodyPr wrap="square">
-            <a:spAutoFit/>
-          </a:bodyPr>
-          <a:lstStyle/>
-          <a:p>
-            <a:pPr>
-              <a:spcAft>
-                <a:spcPts val="500"/>
-              </a:spcAft>
-            </a:pPr>
-            <a:r>
-              <a:rPr sz="1200" b="0" i="0">
-                <a:solidFill>
-                  <a:srgbClr val="1A1A1A"/>
-                </a:solidFill>
-                <a:latin typeface="Consolas"/>
-              </a:rPr>
-              <a:t>    \min_{\delta}\ \max_{\Sigma\in\mathcal{U}}\ \Big\{\text{spread P\&amp;L} - \tfrac12 q^{\mathsf T}\Sigma q\Big\}</a:t>
-            </a:r>
-          </a:p>
-          <a:p>
-            <a:pPr>
-              <a:spcAft>
-                <a:spcPts val="500"/>
-              </a:spcAft>
-            </a:pPr>
-            <a:r>
-              <a:rPr sz="1200" b="0" i="0">
-                <a:solidFill>
-                  <a:srgbClr val="1A1A1A"/>
-                </a:solidFill>
-                <a:latin typeface="Arial"/>
-              </a:rPr>
-              <a:t>•  why: Robust market making: we do not trust a single covariance estimate $\Sigma$, so we optimize against the WORST case over an uncertainty set $\mathcal{U}$. This widens quotes exactly where parameter risk is highest -- a principled cure for over-fitting the penalty matrix.</a:t>
-            </a:r>
-          </a:p>
-        </p:txBody>
-      </p:sp>
+        </p:spPr>
+      </p:pic>
     </p:spTree>
   </p:cSld>
   <p:clrMapOvr>
@@ -4550,7 +4985,7 @@
                 </a:solidFill>
                 <a:latin typeface="Arial"/>
               </a:rPr>
-              <a:t>Getting the Data from Coincall</a:t>
+              <a:t>Key Equations &amp; Why We Choose Them</a:t>
             </a:r>
           </a:p>
           <a:p>
@@ -4561,7 +4996,7 @@
                 </a:solidFill>
                 <a:latin typeface="Arial"/>
               </a:rPr>
-              <a:t>Cross-check exact paths at https://docs.coincall.com/</a:t>
+              <a:t>Full derivations in the PDF deck</a:t>
             </a:r>
           </a:p>
         </p:txBody>
@@ -4641,9 +5076,9 @@
                 <a:solidFill>
                   <a:srgbClr val="1A1A1A"/>
                 </a:solidFill>
-                <a:latin typeface="Arial"/>
-              </a:rPr>
-              <a:t>•  Multi-asset extension needs BTC and ETH chains together:</a:t>
+                <a:latin typeface="Consolas"/>
+              </a:rPr>
+              <a:t>    \min_{\delta}\ \max_{\Sigma\in\mathcal{U}}\ \Big\{\text{spread P\&amp;L} - \tfrac12 q^{\mathsf T}\Sigma q\Big\}</a:t>
             </a:r>
           </a:p>
           <a:p>
@@ -4657,41 +5092,9 @@
                 <a:solidFill>
                   <a:srgbClr val="1A1A1A"/>
                 </a:solidFill>
-                <a:latin typeface="Consolas"/>
-              </a:rPr>
-              <a:t>    GET /open/option/get/v1/BTC   and   GET /open/option/get/v1/ETH</a:t>
-            </a:r>
-          </a:p>
-          <a:p>
-            <a:pPr>
-              <a:spcAft>
-                <a:spcPts val="500"/>
-              </a:spcAft>
-            </a:pPr>
-            <a:r>
-              <a:rPr sz="1200" b="0" i="0">
-                <a:solidFill>
-                  <a:srgbClr val="1A1A1A"/>
-                </a:solidFill>
                 <a:latin typeface="Arial"/>
               </a:rPr>
-              <a:t>•  Correlation from perp klines (BTC vs ETH) over your backtest window</a:t>
-            </a:r>
-          </a:p>
-          <a:p>
-            <a:pPr>
-              <a:spcAft>
-                <a:spcPts val="500"/>
-              </a:spcAft>
-            </a:pPr>
-            <a:r>
-              <a:rPr sz="1200" b="0" i="0">
-                <a:solidFill>
-                  <a:srgbClr val="1A1A1A"/>
-                </a:solidFill>
-                <a:latin typeface="Arial"/>
-              </a:rPr>
-              <a:t>•  Reuse all Milestone-3 Parquet datasets; no new sources required</a:t>
+              <a:t>•  why: Robust market making: we do not trust a single covariance estimate $\Sigma$, so we optimize against the WORST case over an uncertainty set $\mathcal{U}$. This widens quotes exactly where parameter risk is highest -- a principled cure for over-fitting the penalty matrix.</a:t>
             </a:r>
           </a:p>
         </p:txBody>
@@ -4705,212 +5108,6 @@
 </file>
 
 <file path=ppt/slides/slide8.xml><?xml version="1.0" encoding="utf-8"?>
-<p:sld xmlns:a="http://schemas.openxmlformats.org/drawingml/2006/main" xmlns:p="http://schemas.openxmlformats.org/presentationml/2006/main" xmlns:r="http://schemas.openxmlformats.org/officeDocument/2006/relationships">
-  <p:cSld>
-    <p:spTree>
-      <p:nvGrpSpPr>
-        <p:cNvPr id="1" name=""/>
-        <p:cNvGrpSpPr/>
-        <p:nvPr/>
-      </p:nvGrpSpPr>
-      <p:grpSpPr/>
-      <p:sp>
-        <p:nvSpPr>
-          <p:cNvPr id="2" name="TextBox 1"/>
-          <p:cNvSpPr txBox="1"/>
-          <p:nvPr/>
-        </p:nvSpPr>
-        <p:spPr>
-          <a:xfrm>
-            <a:off x="457200" y="365760"/>
-            <a:ext cx="11247120" cy="640080"/>
-          </a:xfrm>
-          <a:prstGeom prst="rect">
-            <a:avLst/>
-          </a:prstGeom>
-          <a:noFill/>
-        </p:spPr>
-        <p:txBody>
-          <a:bodyPr wrap="none">
-            <a:spAutoFit/>
-          </a:bodyPr>
-          <a:lstStyle/>
-          <a:p>
-            <a:r>
-              <a:rPr sz="1800" b="1" i="0">
-                <a:solidFill>
-                  <a:srgbClr val="990000"/>
-                </a:solidFill>
-                <a:latin typeface="Arial"/>
-              </a:rPr>
-              <a:t>Code — week10_collar.py -- structured-product payoff (collar)</a:t>
-            </a:r>
-          </a:p>
-        </p:txBody>
-      </p:sp>
-      <p:sp>
-        <p:nvSpPr>
-          <p:cNvPr id="3" name="Rectangle 2"/>
-          <p:cNvSpPr/>
-          <p:nvPr/>
-        </p:nvSpPr>
-        <p:spPr>
-          <a:xfrm>
-            <a:off x="457200" y="1097280"/>
-            <a:ext cx="11247120" cy="5394960"/>
-          </a:xfrm>
-          <a:prstGeom prst="rect">
-            <a:avLst/>
-          </a:prstGeom>
-          <a:solidFill>
-            <a:srgbClr val="F5F5F5"/>
-          </a:solidFill>
-          <a:ln w="9525">
-            <a:solidFill>
-              <a:srgbClr val="6D6D6D"/>
-            </a:solidFill>
-          </a:ln>
-        </p:spPr>
-        <p:style>
-          <a:lnRef idx="1">
-            <a:schemeClr val="accent1"/>
-          </a:lnRef>
-          <a:fillRef idx="3">
-            <a:schemeClr val="accent1"/>
-          </a:fillRef>
-          <a:effectRef idx="2">
-            <a:schemeClr val="accent1"/>
-          </a:effectRef>
-          <a:fontRef idx="minor">
-            <a:schemeClr val="lt1"/>
-          </a:fontRef>
-        </p:style>
-        <p:txBody>
-          <a:bodyPr rtlCol="0" anchor="ctr" wrap="square" lIns="182880" tIns="91440"/>
-          <a:lstStyle/>
-          <a:p>
-            <a:pPr algn="ctr">
-              <a:spcAft>
-                <a:spcPts val="0"/>
-              </a:spcAft>
-            </a:pPr>
-            <a:r>
-              <a:rPr sz="1100" b="0" i="0">
-                <a:solidFill>
-                  <a:srgbClr val="1A1A1A"/>
-                </a:solidFill>
-                <a:latin typeface="Consolas"/>
-              </a:rPr>
-              <a:t>import numpy as np</a:t>
-            </a:r>
-          </a:p>
-          <a:p>
-            <a:pPr>
-              <a:spcAft>
-                <a:spcPts val="0"/>
-              </a:spcAft>
-            </a:pPr>
-            <a:r>
-              <a:rPr sz="1100" b="0" i="0">
-                <a:solidFill>
-                  <a:srgbClr val="1A1A1A"/>
-                </a:solidFill>
-                <a:latin typeface="Consolas"/>
-              </a:rPr>
-              <a:t>def collar_payoff(S, spot=100.0, put_K=90.0, call_K=110.0):</a:t>
-            </a:r>
-          </a:p>
-          <a:p>
-            <a:pPr>
-              <a:spcAft>
-                <a:spcPts val="0"/>
-              </a:spcAft>
-            </a:pPr>
-            <a:r>
-              <a:rPr sz="1100" b="0" i="0">
-                <a:solidFill>
-                  <a:srgbClr val="1A1A1A"/>
-                </a:solidFill>
-                <a:latin typeface="Consolas"/>
-              </a:rPr>
-              <a:t>    """Long underlying + long put(put_K) + short call(call_K): a fixed band."""</a:t>
-            </a:r>
-          </a:p>
-          <a:p>
-            <a:pPr>
-              <a:spcAft>
-                <a:spcPts val="0"/>
-              </a:spcAft>
-            </a:pPr>
-            <a:r>
-              <a:rPr sz="1100" b="0" i="0">
-                <a:solidFill>
-                  <a:srgbClr val="1A1A1A"/>
-                </a:solidFill>
-                <a:latin typeface="Consolas"/>
-              </a:rPr>
-              <a:t>    return (S - spot) + np.maximum(put_K - S, 0.0) - np.maximum(S - call_K, 0.0)</a:t>
-            </a:r>
-          </a:p>
-          <a:p>
-            <a:pPr>
-              <a:spcAft>
-                <a:spcPts val="0"/>
-              </a:spcAft>
-            </a:pPr>
-            <a:r>
-              <a:rPr sz="1100" b="0" i="0">
-                <a:solidFill>
-                  <a:srgbClr val="1A1A1A"/>
-                </a:solidFill>
-                <a:latin typeface="Consolas"/>
-              </a:rPr>
-              <a:t> </a:t>
-            </a:r>
-          </a:p>
-          <a:p>
-            <a:pPr>
-              <a:spcAft>
-                <a:spcPts val="0"/>
-              </a:spcAft>
-            </a:pPr>
-            <a:r>
-              <a:rPr sz="1100" b="0" i="0">
-                <a:solidFill>
-                  <a:srgbClr val="1A1A1A"/>
-                </a:solidFill>
-                <a:latin typeface="Consolas"/>
-              </a:rPr>
-              <a:t>S = np.linspace(60, 140, 9)</a:t>
-            </a:r>
-          </a:p>
-          <a:p>
-            <a:pPr>
-              <a:spcAft>
-                <a:spcPts val="0"/>
-              </a:spcAft>
-            </a:pPr>
-            <a:r>
-              <a:rPr sz="1100" b="0" i="0">
-                <a:solidFill>
-                  <a:srgbClr val="1A1A1A"/>
-                </a:solidFill>
-                <a:latin typeface="Consolas"/>
-              </a:rPr>
-              <a:t>print(dict(zip(S.round(0), collar_payoff(S).round(1))))   # capped above, floored below</a:t>
-            </a:r>
-          </a:p>
-        </p:txBody>
-      </p:sp>
-    </p:spTree>
-  </p:cSld>
-  <p:clrMapOvr>
-    <a:masterClrMapping/>
-  </p:clrMapOvr>
-</p:sld>
-</file>
-
-<file path=ppt/slides/slide9.xml><?xml version="1.0" encoding="utf-8"?>
 <p:sld xmlns:a="http://schemas.openxmlformats.org/drawingml/2006/main" xmlns:p="http://schemas.openxmlformats.org/presentationml/2006/main" xmlns:r="http://schemas.openxmlformats.org/officeDocument/2006/relationships">
   <p:cSld>
     <p:spTree>
@@ -4961,7 +5158,7 @@
           <a:noFill/>
         </p:spPr>
         <p:txBody>
-          <a:bodyPr wrap="none">
+          <a:bodyPr wrap="square">
             <a:spAutoFit/>
           </a:bodyPr>
           <a:lstStyle/>
@@ -4973,7 +5170,18 @@
                 </a:solidFill>
                 <a:latin typeface="Arial"/>
               </a:rPr>
-              <a:t>Glossary — Key Terms</a:t>
+              <a:t>Getting the Data from Coincall</a:t>
+            </a:r>
+          </a:p>
+          <a:p>
+            <a:r>
+              <a:rPr sz="1300" b="0" i="1">
+                <a:solidFill>
+                  <a:srgbClr val="6D6D6D"/>
+                </a:solidFill>
+                <a:latin typeface="Arial"/>
+              </a:rPr>
+              <a:t>Cross-check exact paths at https://docs.coincall.com/</a:t>
             </a:r>
           </a:p>
         </p:txBody>
@@ -5045,176 +5253,271 @@
           <a:p>
             <a:pPr>
               <a:spcAft>
-                <a:spcPts val="700"/>
+                <a:spcPts val="500"/>
               </a:spcAft>
             </a:pPr>
             <a:r>
-              <a:rPr sz="1500" b="1" i="0">
-                <a:solidFill>
-                  <a:srgbClr val="CC0000"/>
+              <a:rPr sz="1200" b="0" i="0">
+                <a:solidFill>
+                  <a:srgbClr val="1A1A1A"/>
                 </a:solidFill>
                 <a:latin typeface="Arial"/>
               </a:rPr>
-              <a:t>Multi-asset market making — </a:t>
-            </a:r>
-            <a:r>
-              <a:rPr sz="1500" b="0" i="0">
-                <a:solidFill>
-                  <a:srgbClr val="1A1A1A"/>
-                </a:solidFill>
-                <a:latin typeface="Arial"/>
-              </a:rPr>
-              <a:t>jointly quoting correlated underlyings (e.g., BTC and ETH)</a:t>
+              <a:t>•  Multi-asset extension needs BTC and ETH chains together:</a:t>
             </a:r>
           </a:p>
           <a:p>
             <a:pPr>
               <a:spcAft>
-                <a:spcPts val="700"/>
+                <a:spcPts val="500"/>
               </a:spcAft>
             </a:pPr>
             <a:r>
-              <a:rPr sz="1500" b="1" i="0">
-                <a:solidFill>
-                  <a:srgbClr val="CC0000"/>
-                </a:solidFill>
-                <a:latin typeface="Arial"/>
-              </a:rPr>
-              <a:t>Robust optimization — </a:t>
-            </a:r>
-            <a:r>
-              <a:rPr sz="1500" b="0" i="0">
+              <a:rPr sz="1200" b="0" i="0">
                 <a:solidFill>
                   <a:srgbClr val="1A1A1A"/>
                 </a:solidFill>
-                <a:latin typeface="Arial"/>
-              </a:rPr>
-              <a:t>optimizing against the worst case over an uncertainty set</a:t>
+                <a:latin typeface="Consolas"/>
+              </a:rPr>
+              <a:t>    GET /open/option/get/v1/BTC   and   GET /open/option/get/v1/ETH</a:t>
             </a:r>
           </a:p>
           <a:p>
             <a:pPr>
               <a:spcAft>
-                <a:spcPts val="700"/>
+                <a:spcPts val="500"/>
               </a:spcAft>
             </a:pPr>
             <a:r>
-              <a:rPr sz="1500" b="1" i="0">
-                <a:solidFill>
-                  <a:srgbClr val="CC0000"/>
+              <a:rPr sz="1200" b="0" i="0">
+                <a:solidFill>
+                  <a:srgbClr val="1A1A1A"/>
                 </a:solidFill>
                 <a:latin typeface="Arial"/>
               </a:rPr>
-              <a:t>Adverse-selection-aware quoting — </a:t>
-            </a:r>
-            <a:r>
-              <a:rPr sz="1500" b="0" i="0">
-                <a:solidFill>
-                  <a:srgbClr val="1A1A1A"/>
-                </a:solidFill>
-                <a:latin typeface="Arial"/>
-              </a:rPr>
-              <a:t>skewing quotes using order-flow signals</a:t>
+              <a:t>•  Correlation from perp klines (BTC vs ETH) over your backtest window</a:t>
             </a:r>
           </a:p>
           <a:p>
             <a:pPr>
               <a:spcAft>
-                <a:spcPts val="700"/>
+                <a:spcPts val="500"/>
               </a:spcAft>
             </a:pPr>
             <a:r>
-              <a:rPr sz="1500" b="1" i="0">
-                <a:solidFill>
-                  <a:srgbClr val="CC0000"/>
+              <a:rPr sz="1200" b="0" i="0">
+                <a:solidFill>
+                  <a:srgbClr val="1A1A1A"/>
                 </a:solidFill>
                 <a:latin typeface="Arial"/>
               </a:rPr>
-              <a:t>Collar — </a:t>
-            </a:r>
-            <a:r>
-              <a:rPr sz="1500" b="0" i="0">
+              <a:t>•  Reuse all Milestone-3 Parquet datasets; no new sources required</a:t>
+            </a:r>
+          </a:p>
+        </p:txBody>
+      </p:sp>
+    </p:spTree>
+  </p:cSld>
+  <p:clrMapOvr>
+    <a:masterClrMapping/>
+  </p:clrMapOvr>
+</p:sld>
+</file>
+
+<file path=ppt/slides/slide9.xml><?xml version="1.0" encoding="utf-8"?>
+<p:sld xmlns:a="http://schemas.openxmlformats.org/drawingml/2006/main" xmlns:p="http://schemas.openxmlformats.org/presentationml/2006/main" xmlns:r="http://schemas.openxmlformats.org/officeDocument/2006/relationships">
+  <p:cSld>
+    <p:spTree>
+      <p:nvGrpSpPr>
+        <p:cNvPr id="1" name=""/>
+        <p:cNvGrpSpPr/>
+        <p:nvPr/>
+      </p:nvGrpSpPr>
+      <p:grpSpPr/>
+      <p:sp>
+        <p:nvSpPr>
+          <p:cNvPr id="2" name="TextBox 1"/>
+          <p:cNvSpPr txBox="1"/>
+          <p:nvPr/>
+        </p:nvSpPr>
+        <p:spPr>
+          <a:xfrm>
+            <a:off x="457200" y="365760"/>
+            <a:ext cx="11247120" cy="640080"/>
+          </a:xfrm>
+          <a:prstGeom prst="rect">
+            <a:avLst/>
+          </a:prstGeom>
+          <a:noFill/>
+        </p:spPr>
+        <p:txBody>
+          <a:bodyPr wrap="none">
+            <a:spAutoFit/>
+          </a:bodyPr>
+          <a:lstStyle/>
+          <a:p>
+            <a:r>
+              <a:rPr sz="1800" b="1" i="0">
+                <a:solidFill>
+                  <a:srgbClr val="990000"/>
+                </a:solidFill>
+                <a:latin typeface="Arial"/>
+              </a:rPr>
+              <a:t>Code — week10_collar.py -- structured-product payoff (collar)</a:t>
+            </a:r>
+          </a:p>
+        </p:txBody>
+      </p:sp>
+      <p:sp>
+        <p:nvSpPr>
+          <p:cNvPr id="3" name="Rectangle 2"/>
+          <p:cNvSpPr/>
+          <p:nvPr/>
+        </p:nvSpPr>
+        <p:spPr>
+          <a:xfrm>
+            <a:off x="457200" y="1097280"/>
+            <a:ext cx="11247120" cy="5394960"/>
+          </a:xfrm>
+          <a:prstGeom prst="rect">
+            <a:avLst/>
+          </a:prstGeom>
+          <a:solidFill>
+            <a:srgbClr val="F5F5F5"/>
+          </a:solidFill>
+          <a:ln w="9525">
+            <a:solidFill>
+              <a:srgbClr val="6D6D6D"/>
+            </a:solidFill>
+          </a:ln>
+        </p:spPr>
+        <p:style>
+          <a:lnRef idx="1">
+            <a:schemeClr val="accent1"/>
+          </a:lnRef>
+          <a:fillRef idx="3">
+            <a:schemeClr val="accent1"/>
+          </a:fillRef>
+          <a:effectRef idx="2">
+            <a:schemeClr val="accent1"/>
+          </a:effectRef>
+          <a:fontRef idx="minor">
+            <a:schemeClr val="lt1"/>
+          </a:fontRef>
+        </p:style>
+        <p:txBody>
+          <a:bodyPr rtlCol="0" anchor="ctr" wrap="square" lIns="182880" tIns="91440"/>
+          <a:lstStyle/>
+          <a:p>
+            <a:pPr algn="ctr">
+              <a:spcAft>
+                <a:spcPts val="0"/>
+              </a:spcAft>
+            </a:pPr>
+            <a:r>
+              <a:rPr sz="1100" b="0" i="0">
                 <a:solidFill>
                   <a:srgbClr val="1A1A1A"/>
                 </a:solidFill>
-                <a:latin typeface="Arial"/>
-              </a:rPr>
-              <a:t>long put + short call that fixes a price band around a holding</a:t>
+                <a:latin typeface="Consolas"/>
+              </a:rPr>
+              <a:t>import numpy as np</a:t>
             </a:r>
           </a:p>
           <a:p>
             <a:pPr>
               <a:spcAft>
-                <a:spcPts val="700"/>
+                <a:spcPts val="0"/>
               </a:spcAft>
             </a:pPr>
             <a:r>
-              <a:rPr sz="1500" b="1" i="0">
-                <a:solidFill>
-                  <a:srgbClr val="CC0000"/>
-                </a:solidFill>
-                <a:latin typeface="Arial"/>
-              </a:rPr>
-              <a:t>Accumulator / decumulator — </a:t>
-            </a:r>
-            <a:r>
-              <a:rPr sz="1500" b="0" i="0">
+              <a:rPr sz="1100" b="0" i="0">
                 <a:solidFill>
                   <a:srgbClr val="1A1A1A"/>
                 </a:solidFill>
-                <a:latin typeface="Arial"/>
-              </a:rPr>
-              <a:t>products for staged accumulation or liquidation</a:t>
+                <a:latin typeface="Consolas"/>
+              </a:rPr>
+              <a:t>def collar_payoff(S, spot=100.0, put_K=90.0, call_K=110.0):</a:t>
             </a:r>
           </a:p>
           <a:p>
             <a:pPr>
               <a:spcAft>
-                <a:spcPts val="700"/>
+                <a:spcPts val="0"/>
               </a:spcAft>
             </a:pPr>
             <a:r>
-              <a:rPr sz="1500" b="1" i="0">
-                <a:solidFill>
-                  <a:srgbClr val="CC0000"/>
-                </a:solidFill>
-                <a:latin typeface="Arial"/>
-              </a:rPr>
-              <a:t>Coupon product — </a:t>
-            </a:r>
-            <a:r>
-              <a:rPr sz="1500" b="0" i="0">
+              <a:rPr sz="1100" b="0" i="0">
                 <a:solidFill>
                   <a:srgbClr val="1A1A1A"/>
                 </a:solidFill>
-                <a:latin typeface="Arial"/>
-              </a:rPr>
-              <a:t>a yield-enhancement structured note</a:t>
+                <a:latin typeface="Consolas"/>
+              </a:rPr>
+              <a:t>    """Long underlying + long put(put_K) + short call(call_K): a fixed band."""</a:t>
             </a:r>
           </a:p>
           <a:p>
             <a:pPr>
               <a:spcAft>
-                <a:spcPts val="700"/>
+                <a:spcPts val="0"/>
               </a:spcAft>
             </a:pPr>
             <a:r>
-              <a:rPr sz="1500" b="1" i="0">
-                <a:solidFill>
-                  <a:srgbClr val="CC0000"/>
-                </a:solidFill>
-                <a:latin typeface="Arial"/>
-              </a:rPr>
-              <a:t>Structured product — </a:t>
-            </a:r>
-            <a:r>
-              <a:rPr sz="1500" b="0" i="0">
+              <a:rPr sz="1100" b="0" i="0">
                 <a:solidFill>
                   <a:srgbClr val="1A1A1A"/>
                 </a:solidFill>
-                <a:latin typeface="Arial"/>
-              </a:rPr>
-              <a:t>a packaged derivative payoff sold to clients or corporates</a:t>
+                <a:latin typeface="Consolas"/>
+              </a:rPr>
+              <a:t>    return (S - spot) + np.maximum(put_K - S, 0.0) - np.maximum(S - call_K, 0.0)</a:t>
+            </a:r>
+          </a:p>
+          <a:p>
+            <a:pPr>
+              <a:spcAft>
+                <a:spcPts val="0"/>
+              </a:spcAft>
+            </a:pPr>
+            <a:r>
+              <a:rPr sz="1100" b="0" i="0">
+                <a:solidFill>
+                  <a:srgbClr val="1A1A1A"/>
+                </a:solidFill>
+                <a:latin typeface="Consolas"/>
+              </a:rPr>
+              <a:t> </a:t>
+            </a:r>
+          </a:p>
+          <a:p>
+            <a:pPr>
+              <a:spcAft>
+                <a:spcPts val="0"/>
+              </a:spcAft>
+            </a:pPr>
+            <a:r>
+              <a:rPr sz="1100" b="0" i="0">
+                <a:solidFill>
+                  <a:srgbClr val="1A1A1A"/>
+                </a:solidFill>
+                <a:latin typeface="Consolas"/>
+              </a:rPr>
+              <a:t>S = np.linspace(60, 140, 9)</a:t>
+            </a:r>
+          </a:p>
+          <a:p>
+            <a:pPr>
+              <a:spcAft>
+                <a:spcPts val="0"/>
+              </a:spcAft>
+            </a:pPr>
+            <a:r>
+              <a:rPr sz="1100" b="0" i="0">
+                <a:solidFill>
+                  <a:srgbClr val="1A1A1A"/>
+                </a:solidFill>
+                <a:latin typeface="Consolas"/>
+              </a:rPr>
+              <a:t>print(dict(zip(S.round(0), collar_payoff(S).round(1))))   # capped above, floored below</a:t>
             </a:r>
           </a:p>
         </p:txBody>
